--- a/material/Git/01_git_기초.pptx
+++ b/material/Git/01_git_기초.pptx
@@ -1,6 +1,6 @@
 
 <file path=ppt/presentation.xml><?xml version="1.0" encoding="utf-8"?>
-<p:presentation xmlns:a="http://schemas.openxmlformats.org/drawingml/2006/main" xmlns:r="http://schemas.openxmlformats.org/officeDocument/2006/relationships" xmlns:p="http://schemas.openxmlformats.org/presentationml/2006/main" saveSubsetFonts="1">
+<p:presentation xmlns:a="http://schemas.openxmlformats.org/drawingml/2006/main" xmlns:r="http://schemas.openxmlformats.org/officeDocument/2006/relationships" xmlns:p="http://schemas.openxmlformats.org/presentationml/2006/main" embedTrueTypeFonts="1" saveSubsetFonts="1">
   <p:sldMasterIdLst>
     <p:sldMasterId id="2147483660" r:id="rId1"/>
   </p:sldMasterIdLst>
@@ -92,6 +92,42 @@
   </p:sldIdLst>
   <p:sldSz cx="12192000" cy="6858000"/>
   <p:notesSz cx="6858000" cy="9144000"/>
+  <p:embeddedFontLst>
+    <p:embeddedFont>
+      <p:font typeface="G마켓 산스 TTF Bold" panose="02000000000000000000" pitchFamily="2" charset="-127"/>
+      <p:bold r:id="rId84"/>
+    </p:embeddedFont>
+    <p:embeddedFont>
+      <p:font typeface="G마켓 산스 TTF Medium" panose="02000000000000000000" pitchFamily="2" charset="-127"/>
+      <p:regular r:id="rId85"/>
+    </p:embeddedFont>
+    <p:embeddedFont>
+      <p:font typeface="Pretendard Black" panose="02000A03000000020004" pitchFamily="2" charset="-127"/>
+      <p:bold r:id="rId86"/>
+    </p:embeddedFont>
+    <p:embeddedFont>
+      <p:font typeface="Pretendard ExtraBold" panose="02000903000000020004" pitchFamily="2" charset="-127"/>
+      <p:bold r:id="rId87"/>
+    </p:embeddedFont>
+    <p:embeddedFont>
+      <p:font typeface="Pretendard Light" panose="02000403000000020004" pitchFamily="2" charset="-127"/>
+      <p:regular r:id="rId88"/>
+    </p:embeddedFont>
+    <p:embeddedFont>
+      <p:font typeface="Pretendard Medium" panose="02000603000000020004" pitchFamily="2" charset="-127"/>
+      <p:regular r:id="rId89"/>
+    </p:embeddedFont>
+    <p:embeddedFont>
+      <p:font typeface="맑은 고딕" panose="020B0503020000020004" pitchFamily="50" charset="-127"/>
+      <p:regular r:id="rId90"/>
+      <p:bold r:id="rId91"/>
+    </p:embeddedFont>
+    <p:embeddedFont>
+      <p:font typeface="메이플스토리" panose="02000300000000000000" pitchFamily="2" charset="-127"/>
+      <p:regular r:id="rId92"/>
+      <p:bold r:id="rId93"/>
+    </p:embeddedFont>
+  </p:embeddedFontLst>
   <p:defaultTextStyle>
     <a:defPPr>
       <a:defRPr lang="ko-KR"/>
@@ -298,7 +334,7 @@
             <a:fld id="{A13A867C-D490-40C2-AB8D-A60FA70A9BF5}" type="datetimeFigureOut">
               <a:rPr lang="ko-KR" altLang="en-US" smtClean="0"/>
               <a:pPr/>
-              <a:t>2025-07-08</a:t>
+              <a:t>2025-08-21</a:t>
             </a:fld>
             <a:endParaRPr lang="ko-KR" altLang="en-US" dirty="0"/>
           </a:p>
@@ -7437,7 +7473,7 @@
           <a:p>
             <a:fld id="{442BEE3F-2E9A-4FD8-8B8A-8619F3E161C0}" type="datetime1">
               <a:rPr lang="ko-KR" altLang="en-US" smtClean="0"/>
-              <a:t>2025-07-08</a:t>
+              <a:t>2025-08-21</a:t>
             </a:fld>
             <a:endParaRPr lang="ko-KR" altLang="en-US"/>
           </a:p>
@@ -7724,7 +7760,7 @@
           <a:p>
             <a:fld id="{0F78D9C4-20C1-4B15-A116-16DC77AD9A1E}" type="datetime1">
               <a:rPr lang="ko-KR" altLang="en-US" smtClean="0"/>
-              <a:t>2025-07-08</a:t>
+              <a:t>2025-08-21</a:t>
             </a:fld>
             <a:endParaRPr lang="ko-KR" altLang="en-US"/>
           </a:p>
@@ -7899,7 +7935,7 @@
           <a:p>
             <a:fld id="{7F5E23C3-0E3D-4E4E-8486-D7FB4C073DC1}" type="datetime1">
               <a:rPr lang="ko-KR" altLang="en-US" smtClean="0"/>
-              <a:t>2025-07-08</a:t>
+              <a:t>2025-08-21</a:t>
             </a:fld>
             <a:endParaRPr lang="ko-KR" altLang="en-US"/>
           </a:p>
@@ -8228,7 +8264,7 @@
           <a:p>
             <a:fld id="{7F5E23C3-0E3D-4E4E-8486-D7FB4C073DC1}" type="datetime1">
               <a:rPr lang="ko-KR" altLang="en-US" smtClean="0"/>
-              <a:t>2025-07-08</a:t>
+              <a:t>2025-08-21</a:t>
             </a:fld>
             <a:endParaRPr lang="ko-KR" altLang="en-US"/>
           </a:p>
@@ -8995,7 +9031,7 @@
           <a:p>
             <a:fld id="{3C9CE3CE-253F-4F9D-BA15-C226C8D8501E}" type="datetime6">
               <a:rPr lang="ko-KR" altLang="en-US" smtClean="0"/>
-              <a:t>2025년 7월</a:t>
+              <a:t>2025년 8월</a:t>
             </a:fld>
             <a:endParaRPr lang="ko-KR" altLang="en-US"/>
           </a:p>
@@ -10090,7 +10126,7 @@
           <a:p>
             <a:fld id="{3C9CE3CE-253F-4F9D-BA15-C226C8D8501E}" type="datetime6">
               <a:rPr lang="ko-KR" altLang="en-US" smtClean="0"/>
-              <a:t>2025년 7월</a:t>
+              <a:t>2025년 8월</a:t>
             </a:fld>
             <a:endParaRPr lang="ko-KR" altLang="en-US"/>
           </a:p>
@@ -11223,7 +11259,7 @@
           <a:p>
             <a:fld id="{3C9CE3CE-253F-4F9D-BA15-C226C8D8501E}" type="datetime6">
               <a:rPr lang="ko-KR" altLang="en-US" smtClean="0"/>
-              <a:t>2025년 7월</a:t>
+              <a:t>2025년 8월</a:t>
             </a:fld>
             <a:endParaRPr lang="ko-KR" altLang="en-US"/>
           </a:p>
@@ -12417,7 +12453,7 @@
           <a:p>
             <a:fld id="{3C9CE3CE-253F-4F9D-BA15-C226C8D8501E}" type="datetime6">
               <a:rPr lang="ko-KR" altLang="en-US" smtClean="0"/>
-              <a:t>2025년 7월</a:t>
+              <a:t>2025년 8월</a:t>
             </a:fld>
             <a:endParaRPr lang="ko-KR" altLang="en-US"/>
           </a:p>
@@ -14032,7 +14068,7 @@
             <a:fld id="{09FE4672-E219-4AF7-BCFD-84211D3D1F47}" type="datetime6">
               <a:rPr lang="ko-KR" altLang="en-US" smtClean="0"/>
               <a:pPr/>
-              <a:t>2025년 7월</a:t>
+              <a:t>2025년 8월</a:t>
             </a:fld>
             <a:endParaRPr lang="ko-KR" altLang="en-US"/>
           </a:p>
@@ -14226,7 +14262,7 @@
             <a:fld id="{09FE4672-E219-4AF7-BCFD-84211D3D1F47}" type="datetime6">
               <a:rPr lang="ko-KR" altLang="en-US" smtClean="0"/>
               <a:pPr/>
-              <a:t>2025년 7월</a:t>
+              <a:t>2025년 8월</a:t>
             </a:fld>
             <a:endParaRPr lang="ko-KR" altLang="en-US" dirty="0"/>
           </a:p>
@@ -14678,7 +14714,7 @@
             <a:fld id="{09FE4672-E219-4AF7-BCFD-84211D3D1F47}" type="datetime6">
               <a:rPr lang="ko-KR" altLang="en-US" smtClean="0"/>
               <a:pPr/>
-              <a:t>2025년 7월</a:t>
+              <a:t>2025년 8월</a:t>
             </a:fld>
             <a:endParaRPr lang="ko-KR" altLang="en-US" dirty="0"/>
           </a:p>
@@ -15181,7 +15217,7 @@
             <a:fld id="{09FE4672-E219-4AF7-BCFD-84211D3D1F47}" type="datetime6">
               <a:rPr lang="ko-KR" altLang="en-US" smtClean="0"/>
               <a:pPr/>
-              <a:t>2025년 7월</a:t>
+              <a:t>2025년 8월</a:t>
             </a:fld>
             <a:endParaRPr lang="ko-KR" altLang="en-US" dirty="0"/>
           </a:p>
@@ -19974,7 +20010,7 @@
           <a:p>
             <a:fld id="{0F78D9C4-20C1-4B15-A116-16DC77AD9A1E}" type="datetime1">
               <a:rPr lang="ko-KR" altLang="en-US" smtClean="0"/>
-              <a:t>2025-07-08</a:t>
+              <a:t>2025-08-21</a:t>
             </a:fld>
             <a:endParaRPr lang="ko-KR" altLang="en-US"/>
           </a:p>
@@ -21881,7 +21917,7 @@
           <a:p>
             <a:fld id="{76022175-F16A-4A96-8E45-178BE9345AE9}" type="datetime6">
               <a:rPr lang="ko-KR" altLang="en-US" smtClean="0"/>
-              <a:t>2025년 7월</a:t>
+              <a:t>2025년 8월</a:t>
             </a:fld>
             <a:endParaRPr lang="ko-KR" altLang="en-US"/>
           </a:p>
@@ -22359,7 +22395,7 @@
           <a:p>
             <a:fld id="{3C9CE3CE-253F-4F9D-BA15-C226C8D8501E}" type="datetime6">
               <a:rPr lang="ko-KR" altLang="en-US" smtClean="0"/>
-              <a:t>2025년 7월</a:t>
+              <a:t>2025년 8월</a:t>
             </a:fld>
             <a:endParaRPr lang="ko-KR" altLang="en-US"/>
           </a:p>
@@ -22936,7 +22972,7 @@
           <a:p>
             <a:fld id="{3C9CE3CE-253F-4F9D-BA15-C226C8D8501E}" type="datetime6">
               <a:rPr lang="ko-KR" altLang="en-US" smtClean="0"/>
-              <a:t>2025년 7월</a:t>
+              <a:t>2025년 8월</a:t>
             </a:fld>
             <a:endParaRPr lang="ko-KR" altLang="en-US"/>
           </a:p>
@@ -23437,7 +23473,7 @@
           <a:p>
             <a:fld id="{0F78D9C4-20C1-4B15-A116-16DC77AD9A1E}" type="datetime1">
               <a:rPr lang="ko-KR" altLang="en-US" smtClean="0"/>
-              <a:t>2025-07-08</a:t>
+              <a:t>2025-08-21</a:t>
             </a:fld>
             <a:endParaRPr lang="ko-KR" altLang="en-US"/>
           </a:p>
@@ -27407,7 +27443,7 @@
           <a:p>
             <a:fld id="{126F6B89-4082-49DC-A306-910E461DCB41}" type="datetime6">
               <a:rPr lang="ko-KR" altLang="en-US" smtClean="0"/>
-              <a:t>2025년 7월</a:t>
+              <a:t>2025년 8월</a:t>
             </a:fld>
             <a:endParaRPr lang="ko-KR" altLang="en-US"/>
           </a:p>
@@ -30450,7 +30486,7 @@
                 <a:ea typeface="Pretendard Medium" panose="02000603000000020004" pitchFamily="50" charset="-127"/>
                 <a:cs typeface="Pretendard Medium" panose="02000603000000020004" pitchFamily="50" charset="-127"/>
               </a:rPr>
-              <a:t>2025년 7월</a:t>
+              <a:t>2025년 8월</a:t>
             </a:fld>
             <a:endParaRPr lang="ko-KR" altLang="en-US">
               <a:latin typeface="Pretendard Medium" panose="02000603000000020004" pitchFamily="50" charset="-127"/>
@@ -32728,7 +32764,7 @@
           <a:p>
             <a:fld id="{0F78D9C4-20C1-4B15-A116-16DC77AD9A1E}" type="datetime1">
               <a:rPr lang="ko-KR" altLang="en-US" smtClean="0"/>
-              <a:t>2025-07-08</a:t>
+              <a:t>2025-08-21</a:t>
             </a:fld>
             <a:endParaRPr lang="ko-KR" altLang="en-US" dirty="0"/>
           </a:p>
@@ -34224,7 +34260,7 @@
           <a:p>
             <a:fld id="{0F78D9C4-20C1-4B15-A116-16DC77AD9A1E}" type="datetime1">
               <a:rPr lang="ko-KR" altLang="en-US" smtClean="0"/>
-              <a:t>2025-07-08</a:t>
+              <a:t>2025-08-21</a:t>
             </a:fld>
             <a:endParaRPr lang="ko-KR" altLang="en-US"/>
           </a:p>
@@ -36542,7 +36578,7 @@
           <a:p>
             <a:fld id="{3C9CE3CE-253F-4F9D-BA15-C226C8D8501E}" type="datetime6">
               <a:rPr lang="ko-KR" altLang="en-US" smtClean="0"/>
-              <a:t>2025년 7월</a:t>
+              <a:t>2025년 8월</a:t>
             </a:fld>
             <a:endParaRPr lang="ko-KR" altLang="en-US" dirty="0"/>
           </a:p>
@@ -37223,7 +37259,7 @@
           <a:p>
             <a:fld id="{126F6B89-4082-49DC-A306-910E461DCB41}" type="datetime6">
               <a:rPr lang="ko-KR" altLang="en-US" smtClean="0"/>
-              <a:t>2025년 7월</a:t>
+              <a:t>2025년 8월</a:t>
             </a:fld>
             <a:endParaRPr lang="ko-KR" altLang="en-US"/>
           </a:p>
@@ -38059,7 +38095,7 @@
           <a:p>
             <a:fld id="{D5470E82-21E3-488C-BCDC-EB030ADC6AB3}" type="datetime6">
               <a:rPr lang="ko-KR" altLang="en-US" smtClean="0"/>
-              <a:t>2025년 7월</a:t>
+              <a:t>2025년 8월</a:t>
             </a:fld>
             <a:endParaRPr lang="ko-KR" altLang="en-US"/>
           </a:p>
@@ -38716,7 +38752,7 @@
           <a:p>
             <a:fld id="{0F78D9C4-20C1-4B15-A116-16DC77AD9A1E}" type="datetime1">
               <a:rPr lang="ko-KR" altLang="en-US" smtClean="0"/>
-              <a:t>2025-07-08</a:t>
+              <a:t>2025-08-21</a:t>
             </a:fld>
             <a:endParaRPr lang="ko-KR" altLang="en-US"/>
           </a:p>
@@ -39053,7 +39089,7 @@
           <a:p>
             <a:fld id="{0F78D9C4-20C1-4B15-A116-16DC77AD9A1E}" type="datetime1">
               <a:rPr lang="ko-KR" altLang="en-US" smtClean="0"/>
-              <a:t>2025-07-08</a:t>
+              <a:t>2025-08-21</a:t>
             </a:fld>
             <a:endParaRPr lang="ko-KR" altLang="en-US"/>
           </a:p>
@@ -39582,7 +39618,7 @@
           <a:p>
             <a:fld id="{0F78D9C4-20C1-4B15-A116-16DC77AD9A1E}" type="datetime1">
               <a:rPr lang="ko-KR" altLang="en-US" smtClean="0"/>
-              <a:t>2025-07-08</a:t>
+              <a:t>2025-08-21</a:t>
             </a:fld>
             <a:endParaRPr lang="ko-KR" altLang="en-US"/>
           </a:p>
@@ -41063,7 +41099,7 @@
           <a:p>
             <a:fld id="{3C9CE3CE-253F-4F9D-BA15-C226C8D8501E}" type="datetime6">
               <a:rPr lang="ko-KR" altLang="en-US" smtClean="0"/>
-              <a:t>2025년 7월</a:t>
+              <a:t>2025년 8월</a:t>
             </a:fld>
             <a:endParaRPr lang="ko-KR" altLang="en-US" dirty="0"/>
           </a:p>
@@ -42711,7 +42747,7 @@
           <a:p>
             <a:fld id="{0F78D9C4-20C1-4B15-A116-16DC77AD9A1E}" type="datetime1">
               <a:rPr lang="ko-KR" altLang="en-US" smtClean="0"/>
-              <a:t>2025-07-08</a:t>
+              <a:t>2025-08-21</a:t>
             </a:fld>
             <a:endParaRPr lang="ko-KR" altLang="en-US"/>
           </a:p>
@@ -43081,7 +43117,7 @@
           <a:p>
             <a:fld id="{0F78D9C4-20C1-4B15-A116-16DC77AD9A1E}" type="datetime1">
               <a:rPr lang="ko-KR" altLang="en-US" smtClean="0"/>
-              <a:t>2025-07-08</a:t>
+              <a:t>2025-08-21</a:t>
             </a:fld>
             <a:endParaRPr lang="ko-KR" altLang="en-US"/>
           </a:p>
@@ -43449,7 +43485,7 @@
           <a:p>
             <a:fld id="{0F78D9C4-20C1-4B15-A116-16DC77AD9A1E}" type="datetime1">
               <a:rPr lang="ko-KR" altLang="en-US" smtClean="0"/>
-              <a:t>2025-07-08</a:t>
+              <a:t>2025-08-21</a:t>
             </a:fld>
             <a:endParaRPr lang="ko-KR" altLang="en-US"/>
           </a:p>
@@ -44698,7 +44734,7 @@
           <a:p>
             <a:fld id="{0F78D9C4-20C1-4B15-A116-16DC77AD9A1E}" type="datetime1">
               <a:rPr lang="ko-KR" altLang="en-US" smtClean="0"/>
-              <a:t>2025-07-08</a:t>
+              <a:t>2025-08-21</a:t>
             </a:fld>
             <a:endParaRPr lang="ko-KR" altLang="en-US"/>
           </a:p>
@@ -46163,7 +46199,7 @@
           <a:p>
             <a:fld id="{3C9CE3CE-253F-4F9D-BA15-C226C8D8501E}" type="datetime6">
               <a:rPr lang="ko-KR" altLang="en-US" smtClean="0"/>
-              <a:t>2025년 7월</a:t>
+              <a:t>2025년 8월</a:t>
             </a:fld>
             <a:endParaRPr lang="ko-KR" altLang="en-US"/>
           </a:p>
@@ -47379,7 +47415,7 @@
           <a:p>
             <a:fld id="{0F78D9C4-20C1-4B15-A116-16DC77AD9A1E}" type="datetime1">
               <a:rPr lang="ko-KR" altLang="en-US" smtClean="0"/>
-              <a:t>2025-07-08</a:t>
+              <a:t>2025-08-21</a:t>
             </a:fld>
             <a:endParaRPr lang="ko-KR" altLang="en-US"/>
           </a:p>
@@ -47563,7 +47599,7 @@
           <a:p>
             <a:fld id="{3C9CE3CE-253F-4F9D-BA15-C226C8D8501E}" type="datetime6">
               <a:rPr lang="ko-KR" altLang="en-US" smtClean="0"/>
-              <a:t>2025년 7월</a:t>
+              <a:t>2025년 8월</a:t>
             </a:fld>
             <a:endParaRPr lang="ko-KR" altLang="en-US"/>
           </a:p>
